--- a/PricePower.pptx
+++ b/PricePower.pptx
@@ -900,8 +900,8 @@
         </p:nvSpPr>
         <p:spPr>
           <a:xfrm>
-            <a:off x="1143225" y="685800"/>
-            <a:ext cx="4572225" cy="3429000"/>
+            <a:off x="381000" y="685800"/>
+            <a:ext cx="6096000" cy="3429000"/>
           </a:xfrm>
           <a:custGeom>
             <a:avLst/>
@@ -1108,8 +1108,8 @@
         </p:nvSpPr>
         <p:spPr>
           <a:xfrm>
-            <a:off x="1143225" y="685800"/>
-            <a:ext cx="4572225" cy="3429000"/>
+            <a:off x="381000" y="685800"/>
+            <a:ext cx="6096000" cy="3429000"/>
           </a:xfrm>
           <a:custGeom>
             <a:avLst/>
@@ -1940,8 +1940,8 @@
         </p:nvSpPr>
         <p:spPr>
           <a:xfrm>
-            <a:off x="1143225" y="685800"/>
-            <a:ext cx="4572225" cy="3429000"/>
+            <a:off x="381000" y="685800"/>
+            <a:ext cx="6096000" cy="3429000"/>
           </a:xfrm>
           <a:custGeom>
             <a:avLst/>
@@ -2044,8 +2044,8 @@
         </p:nvSpPr>
         <p:spPr>
           <a:xfrm>
-            <a:off x="1143225" y="685800"/>
-            <a:ext cx="4572225" cy="3429000"/>
+            <a:off x="381000" y="685800"/>
+            <a:ext cx="6096000" cy="3429000"/>
           </a:xfrm>
           <a:custGeom>
             <a:avLst/>
@@ -12396,7 +12396,7 @@
         <p:spPr>
           <a:xfrm>
             <a:off x="571500" y="5429250"/>
-            <a:ext cx="11049000" cy="304800"/>
+            <a:ext cx="11049000" cy="369332"/>
           </a:xfrm>
           <a:prstGeom prst="rect">
             <a:avLst/>
@@ -12425,7 +12425,7 @@
               <a:buNone/>
             </a:pPr>
             <a:r>
-              <a:rPr lang="en-US" sz="1500" b="0" i="0" u="none" strike="noStrike" cap="none">
+              <a:rPr lang="en-US" sz="1500" b="0" i="0" u="none" strike="noStrike" cap="none" dirty="0" err="1">
                 <a:solidFill>
                   <a:srgbClr val="334155"/>
                 </a:solidFill>
@@ -12434,9 +12434,237 @@
                 <a:cs typeface="DM Sans"/>
                 <a:sym typeface="DM Sans"/>
               </a:rPr>
-              <a:t>Symulacja wpływu zakupu gry AAA na miesięczny budżet domowy w regionie PL.</a:t>
+              <a:t>Symulacja</a:t>
             </a:r>
-            <a:endParaRPr/>
+            <a:r>
+              <a:rPr lang="en-US" sz="1500" b="0" i="0" u="none" strike="noStrike" cap="none" dirty="0">
+                <a:solidFill>
+                  <a:srgbClr val="334155"/>
+                </a:solidFill>
+                <a:latin typeface="DM Sans"/>
+                <a:ea typeface="DM Sans"/>
+                <a:cs typeface="DM Sans"/>
+                <a:sym typeface="DM Sans"/>
+              </a:rPr>
+              <a:t> </a:t>
+            </a:r>
+            <a:r>
+              <a:rPr lang="en-US" sz="1500" b="0" i="0" u="none" strike="noStrike" cap="none" dirty="0" err="1">
+                <a:solidFill>
+                  <a:srgbClr val="334155"/>
+                </a:solidFill>
+                <a:latin typeface="DM Sans"/>
+                <a:ea typeface="DM Sans"/>
+                <a:cs typeface="DM Sans"/>
+                <a:sym typeface="DM Sans"/>
+              </a:rPr>
+              <a:t>wpływu</a:t>
+            </a:r>
+            <a:r>
+              <a:rPr lang="en-US" sz="1500" b="0" i="0" u="none" strike="noStrike" cap="none" dirty="0">
+                <a:solidFill>
+                  <a:srgbClr val="334155"/>
+                </a:solidFill>
+                <a:latin typeface="DM Sans"/>
+                <a:ea typeface="DM Sans"/>
+                <a:cs typeface="DM Sans"/>
+                <a:sym typeface="DM Sans"/>
+              </a:rPr>
+              <a:t> </a:t>
+            </a:r>
+            <a:r>
+              <a:rPr lang="en-US" sz="1500" b="0" i="0" u="none" strike="noStrike" cap="none" dirty="0" err="1">
+                <a:solidFill>
+                  <a:srgbClr val="334155"/>
+                </a:solidFill>
+                <a:latin typeface="DM Sans"/>
+                <a:ea typeface="DM Sans"/>
+                <a:cs typeface="DM Sans"/>
+                <a:sym typeface="DM Sans"/>
+              </a:rPr>
+              <a:t>zakupu</a:t>
+            </a:r>
+            <a:r>
+              <a:rPr lang="en-US" sz="1500" b="0" i="0" u="none" strike="noStrike" cap="none" dirty="0">
+                <a:solidFill>
+                  <a:srgbClr val="334155"/>
+                </a:solidFill>
+                <a:latin typeface="DM Sans"/>
+                <a:ea typeface="DM Sans"/>
+                <a:cs typeface="DM Sans"/>
+                <a:sym typeface="DM Sans"/>
+              </a:rPr>
+              <a:t> </a:t>
+            </a:r>
+            <a:r>
+              <a:rPr lang="en-US" sz="1500" b="0" i="0" u="none" strike="noStrike" cap="none" dirty="0" err="1">
+                <a:solidFill>
+                  <a:srgbClr val="334155"/>
+                </a:solidFill>
+                <a:latin typeface="DM Sans"/>
+                <a:ea typeface="DM Sans"/>
+                <a:cs typeface="DM Sans"/>
+                <a:sym typeface="DM Sans"/>
+              </a:rPr>
+              <a:t>gry</a:t>
+            </a:r>
+            <a:r>
+              <a:rPr lang="en-US" sz="1500" b="0" i="0" u="none" strike="noStrike" cap="none" dirty="0">
+                <a:solidFill>
+                  <a:srgbClr val="334155"/>
+                </a:solidFill>
+                <a:latin typeface="DM Sans"/>
+                <a:ea typeface="DM Sans"/>
+                <a:cs typeface="DM Sans"/>
+                <a:sym typeface="DM Sans"/>
+              </a:rPr>
+              <a:t> AAA </a:t>
+            </a:r>
+            <a:r>
+              <a:rPr lang="en-US" sz="1500" b="0" i="0" u="none" strike="noStrike" cap="none" dirty="0" err="1">
+                <a:solidFill>
+                  <a:srgbClr val="334155"/>
+                </a:solidFill>
+                <a:latin typeface="DM Sans"/>
+                <a:ea typeface="DM Sans"/>
+                <a:cs typeface="DM Sans"/>
+                <a:sym typeface="DM Sans"/>
+              </a:rPr>
+              <a:t>na</a:t>
+            </a:r>
+            <a:r>
+              <a:rPr lang="en-US" sz="1500" b="0" i="0" u="none" strike="noStrike" cap="none" dirty="0">
+                <a:solidFill>
+                  <a:srgbClr val="334155"/>
+                </a:solidFill>
+                <a:latin typeface="DM Sans"/>
+                <a:ea typeface="DM Sans"/>
+                <a:cs typeface="DM Sans"/>
+                <a:sym typeface="DM Sans"/>
+              </a:rPr>
+              <a:t> </a:t>
+            </a:r>
+            <a:r>
+              <a:rPr lang="en-US" sz="1500" b="0" i="0" u="none" strike="noStrike" cap="none" dirty="0" err="1">
+                <a:solidFill>
+                  <a:srgbClr val="334155"/>
+                </a:solidFill>
+                <a:latin typeface="DM Sans"/>
+                <a:ea typeface="DM Sans"/>
+                <a:cs typeface="DM Sans"/>
+                <a:sym typeface="DM Sans"/>
+              </a:rPr>
+              <a:t>miesięczny</a:t>
+            </a:r>
+            <a:r>
+              <a:rPr lang="en-US" sz="1500" b="0" i="0" u="none" strike="noStrike" cap="none" dirty="0">
+                <a:solidFill>
+                  <a:srgbClr val="334155"/>
+                </a:solidFill>
+                <a:latin typeface="DM Sans"/>
+                <a:ea typeface="DM Sans"/>
+                <a:cs typeface="DM Sans"/>
+                <a:sym typeface="DM Sans"/>
+              </a:rPr>
+              <a:t> </a:t>
+            </a:r>
+            <a:r>
+              <a:rPr lang="en-US" sz="1500" b="0" i="0" u="none" strike="noStrike" cap="none" dirty="0" err="1">
+                <a:solidFill>
+                  <a:srgbClr val="334155"/>
+                </a:solidFill>
+                <a:latin typeface="DM Sans"/>
+                <a:ea typeface="DM Sans"/>
+                <a:cs typeface="DM Sans"/>
+                <a:sym typeface="DM Sans"/>
+              </a:rPr>
+              <a:t>budżet</a:t>
+            </a:r>
+            <a:r>
+              <a:rPr lang="en-US" sz="1500" b="0" i="0" u="none" strike="noStrike" cap="none" dirty="0">
+                <a:solidFill>
+                  <a:srgbClr val="334155"/>
+                </a:solidFill>
+                <a:latin typeface="DM Sans"/>
+                <a:ea typeface="DM Sans"/>
+                <a:cs typeface="DM Sans"/>
+                <a:sym typeface="DM Sans"/>
+              </a:rPr>
+              <a:t> </a:t>
+            </a:r>
+            <a:r>
+              <a:rPr lang="en-US" sz="1500" b="0" i="0" u="none" strike="noStrike" cap="none" dirty="0" err="1">
+                <a:solidFill>
+                  <a:srgbClr val="334155"/>
+                </a:solidFill>
+                <a:latin typeface="DM Sans"/>
+                <a:ea typeface="DM Sans"/>
+                <a:cs typeface="DM Sans"/>
+                <a:sym typeface="DM Sans"/>
+              </a:rPr>
+              <a:t>domowy</a:t>
+            </a:r>
+            <a:r>
+              <a:rPr lang="en-US" sz="1500" b="0" i="0" u="none" strike="noStrike" cap="none" dirty="0">
+                <a:solidFill>
+                  <a:srgbClr val="334155"/>
+                </a:solidFill>
+                <a:latin typeface="DM Sans"/>
+                <a:ea typeface="DM Sans"/>
+                <a:cs typeface="DM Sans"/>
+                <a:sym typeface="DM Sans"/>
+              </a:rPr>
+              <a:t> w </a:t>
+            </a:r>
+            <a:r>
+              <a:rPr lang="en-US" sz="1500" b="0" i="0" u="none" strike="noStrike" cap="none" dirty="0" err="1">
+                <a:solidFill>
+                  <a:srgbClr val="334155"/>
+                </a:solidFill>
+                <a:latin typeface="DM Sans"/>
+                <a:ea typeface="DM Sans"/>
+                <a:cs typeface="DM Sans"/>
+                <a:sym typeface="DM Sans"/>
+              </a:rPr>
+              <a:t>regionie</a:t>
+            </a:r>
+            <a:r>
+              <a:rPr lang="en-US" sz="1500" b="0" i="0" u="none" strike="noStrike" cap="none" dirty="0">
+                <a:solidFill>
+                  <a:srgbClr val="334155"/>
+                </a:solidFill>
+                <a:latin typeface="DM Sans"/>
+                <a:ea typeface="DM Sans"/>
+                <a:cs typeface="DM Sans"/>
+                <a:sym typeface="DM Sans"/>
+              </a:rPr>
+              <a:t> </a:t>
+            </a:r>
+            <a:r>
+              <a:rPr lang="pl-PL" sz="1500" dirty="0">
+                <a:solidFill>
+                  <a:srgbClr val="334155"/>
+                </a:solidFill>
+                <a:latin typeface="DM Sans"/>
+                <a:ea typeface="DM Sans"/>
+                <a:cs typeface="DM Sans"/>
+                <a:sym typeface="DM Sans"/>
+              </a:rPr>
+              <a:t>Polski przy minimalnej krajowej</a:t>
+            </a:r>
+            <a:r>
+              <a:rPr lang="en-US" sz="1500" b="0" i="0" u="none" strike="noStrike" cap="none" dirty="0">
+                <a:solidFill>
+                  <a:srgbClr val="334155"/>
+                </a:solidFill>
+                <a:latin typeface="DM Sans"/>
+                <a:ea typeface="DM Sans"/>
+                <a:cs typeface="DM Sans"/>
+                <a:sym typeface="DM Sans"/>
+              </a:rPr>
+              <a:t>.</a:t>
+            </a:r>
+            <a:endParaRPr dirty="0"/>
           </a:p>
         </p:txBody>
       </p:sp>
@@ -13311,7 +13539,7 @@
         <p:spPr>
           <a:xfrm>
             <a:off x="2828925" y="4301430"/>
-            <a:ext cx="6534150" cy="228600"/>
+            <a:ext cx="6534150" cy="207749"/>
           </a:xfrm>
           <a:prstGeom prst="rect">
             <a:avLst/>
@@ -13337,7 +13565,7 @@
               <a:buNone/>
             </a:pPr>
             <a:r>
-              <a:rPr lang="en-US" sz="1350" b="0" i="0" u="none" strike="noStrike" cap="none">
+              <a:rPr lang="pl-PL" sz="1350" b="0" i="0" u="none" strike="noStrike" cap="none" dirty="0" err="1">
                 <a:solidFill>
                   <a:srgbClr val="64748B"/>
                 </a:solidFill>
@@ -13346,9 +13574,21 @@
                 <a:cs typeface="DM Sans"/>
                 <a:sym typeface="DM Sans"/>
               </a:rPr>
-              <a:t>Power Purchasing OLAP Project | Data Warehouse Course 2024</a:t>
+              <a:t>Price</a:t>
             </a:r>
-            <a:endParaRPr/>
+            <a:r>
+              <a:rPr lang="pl-PL" sz="1350" b="0" i="0" u="none" strike="noStrike" cap="none" dirty="0">
+                <a:solidFill>
+                  <a:srgbClr val="64748B"/>
+                </a:solidFill>
+                <a:latin typeface="DM Sans"/>
+                <a:ea typeface="DM Sans"/>
+                <a:cs typeface="DM Sans"/>
+                <a:sym typeface="DM Sans"/>
+              </a:rPr>
+              <a:t> Power Team</a:t>
+            </a:r>
+            <a:endParaRPr dirty="0"/>
           </a:p>
         </p:txBody>
       </p:sp>
@@ -18895,7 +19135,7 @@
         <p:spPr>
           <a:xfrm>
             <a:off x="571500" y="4905375"/>
-            <a:ext cx="11049000" cy="304800"/>
+            <a:ext cx="11049000" cy="738664"/>
           </a:xfrm>
           <a:prstGeom prst="rect">
             <a:avLst/>
@@ -18924,7 +19164,7 @@
               <a:buNone/>
             </a:pPr>
             <a:r>
-              <a:rPr lang="en-US" sz="1500" b="0" i="1" u="none" strike="noStrike" cap="none">
+              <a:rPr lang="en-US" sz="1500" b="0" i="1" u="none" strike="noStrike" cap="none" dirty="0" err="1">
                 <a:solidFill>
                   <a:srgbClr val="334155"/>
                 </a:solidFill>
@@ -18933,9 +19173,213 @@
                 <a:cs typeface="DM Sans"/>
                 <a:sym typeface="DM Sans"/>
               </a:rPr>
-              <a:t>Wykres przedstawia "Time-to-Game" – liczbę godzin pracy potrzebną na zakup gry AAA.</a:t>
+              <a:t>Wykres</a:t>
             </a:r>
-            <a:endParaRPr/>
+            <a:r>
+              <a:rPr lang="en-US" sz="1500" b="0" i="1" u="none" strike="noStrike" cap="none" dirty="0">
+                <a:solidFill>
+                  <a:srgbClr val="334155"/>
+                </a:solidFill>
+                <a:latin typeface="DM Sans"/>
+                <a:ea typeface="DM Sans"/>
+                <a:cs typeface="DM Sans"/>
+                <a:sym typeface="DM Sans"/>
+              </a:rPr>
+              <a:t> </a:t>
+            </a:r>
+            <a:r>
+              <a:rPr lang="en-US" sz="1500" b="0" i="1" u="none" strike="noStrike" cap="none" dirty="0" err="1">
+                <a:solidFill>
+                  <a:srgbClr val="334155"/>
+                </a:solidFill>
+                <a:latin typeface="DM Sans"/>
+                <a:ea typeface="DM Sans"/>
+                <a:cs typeface="DM Sans"/>
+                <a:sym typeface="DM Sans"/>
+              </a:rPr>
+              <a:t>przedstawia</a:t>
+            </a:r>
+            <a:r>
+              <a:rPr lang="en-US" sz="1500" b="0" i="1" u="none" strike="noStrike" cap="none" dirty="0">
+                <a:solidFill>
+                  <a:srgbClr val="334155"/>
+                </a:solidFill>
+                <a:latin typeface="DM Sans"/>
+                <a:ea typeface="DM Sans"/>
+                <a:cs typeface="DM Sans"/>
+                <a:sym typeface="DM Sans"/>
+              </a:rPr>
+              <a:t> "Time-to-Game" – </a:t>
+            </a:r>
+            <a:r>
+              <a:rPr lang="en-US" sz="1500" b="0" i="1" u="none" strike="noStrike" cap="none" dirty="0" err="1">
+                <a:solidFill>
+                  <a:srgbClr val="334155"/>
+                </a:solidFill>
+                <a:latin typeface="DM Sans"/>
+                <a:ea typeface="DM Sans"/>
+                <a:cs typeface="DM Sans"/>
+                <a:sym typeface="DM Sans"/>
+              </a:rPr>
+              <a:t>liczbę</a:t>
+            </a:r>
+            <a:r>
+              <a:rPr lang="en-US" sz="1500" b="0" i="1" u="none" strike="noStrike" cap="none" dirty="0">
+                <a:solidFill>
+                  <a:srgbClr val="334155"/>
+                </a:solidFill>
+                <a:latin typeface="DM Sans"/>
+                <a:ea typeface="DM Sans"/>
+                <a:cs typeface="DM Sans"/>
+                <a:sym typeface="DM Sans"/>
+              </a:rPr>
+              <a:t> </a:t>
+            </a:r>
+            <a:r>
+              <a:rPr lang="en-US" sz="1500" b="0" i="1" u="none" strike="noStrike" cap="none" dirty="0" err="1">
+                <a:solidFill>
+                  <a:srgbClr val="334155"/>
+                </a:solidFill>
+                <a:latin typeface="DM Sans"/>
+                <a:ea typeface="DM Sans"/>
+                <a:cs typeface="DM Sans"/>
+                <a:sym typeface="DM Sans"/>
+              </a:rPr>
+              <a:t>godzin</a:t>
+            </a:r>
+            <a:r>
+              <a:rPr lang="en-US" sz="1500" b="0" i="1" u="none" strike="noStrike" cap="none" dirty="0">
+                <a:solidFill>
+                  <a:srgbClr val="334155"/>
+                </a:solidFill>
+                <a:latin typeface="DM Sans"/>
+                <a:ea typeface="DM Sans"/>
+                <a:cs typeface="DM Sans"/>
+                <a:sym typeface="DM Sans"/>
+              </a:rPr>
+              <a:t> </a:t>
+            </a:r>
+            <a:r>
+              <a:rPr lang="en-US" sz="1500" b="0" i="1" u="none" strike="noStrike" cap="none" dirty="0" err="1">
+                <a:solidFill>
+                  <a:srgbClr val="334155"/>
+                </a:solidFill>
+                <a:latin typeface="DM Sans"/>
+                <a:ea typeface="DM Sans"/>
+                <a:cs typeface="DM Sans"/>
+                <a:sym typeface="DM Sans"/>
+              </a:rPr>
+              <a:t>pracy</a:t>
+            </a:r>
+            <a:r>
+              <a:rPr lang="en-US" sz="1500" b="0" i="1" u="none" strike="noStrike" cap="none" dirty="0">
+                <a:solidFill>
+                  <a:srgbClr val="334155"/>
+                </a:solidFill>
+                <a:latin typeface="DM Sans"/>
+                <a:ea typeface="DM Sans"/>
+                <a:cs typeface="DM Sans"/>
+                <a:sym typeface="DM Sans"/>
+              </a:rPr>
+              <a:t> </a:t>
+            </a:r>
+            <a:r>
+              <a:rPr lang="en-US" sz="1500" b="0" i="1" u="none" strike="noStrike" cap="none" dirty="0" err="1">
+                <a:solidFill>
+                  <a:srgbClr val="334155"/>
+                </a:solidFill>
+                <a:latin typeface="DM Sans"/>
+                <a:ea typeface="DM Sans"/>
+                <a:cs typeface="DM Sans"/>
+                <a:sym typeface="DM Sans"/>
+              </a:rPr>
+              <a:t>potrzebną</a:t>
+            </a:r>
+            <a:r>
+              <a:rPr lang="en-US" sz="1500" b="0" i="1" u="none" strike="noStrike" cap="none" dirty="0">
+                <a:solidFill>
+                  <a:srgbClr val="334155"/>
+                </a:solidFill>
+                <a:latin typeface="DM Sans"/>
+                <a:ea typeface="DM Sans"/>
+                <a:cs typeface="DM Sans"/>
+                <a:sym typeface="DM Sans"/>
+              </a:rPr>
+              <a:t> </a:t>
+            </a:r>
+            <a:r>
+              <a:rPr lang="en-US" sz="1500" b="0" i="1" u="none" strike="noStrike" cap="none" dirty="0" err="1">
+                <a:solidFill>
+                  <a:srgbClr val="334155"/>
+                </a:solidFill>
+                <a:latin typeface="DM Sans"/>
+                <a:ea typeface="DM Sans"/>
+                <a:cs typeface="DM Sans"/>
+                <a:sym typeface="DM Sans"/>
+              </a:rPr>
+              <a:t>na</a:t>
+            </a:r>
+            <a:r>
+              <a:rPr lang="en-US" sz="1500" b="0" i="1" u="none" strike="noStrike" cap="none" dirty="0">
+                <a:solidFill>
+                  <a:srgbClr val="334155"/>
+                </a:solidFill>
+                <a:latin typeface="DM Sans"/>
+                <a:ea typeface="DM Sans"/>
+                <a:cs typeface="DM Sans"/>
+                <a:sym typeface="DM Sans"/>
+              </a:rPr>
+              <a:t> </a:t>
+            </a:r>
+            <a:r>
+              <a:rPr lang="en-US" sz="1500" b="0" i="1" u="none" strike="noStrike" cap="none" dirty="0" err="1">
+                <a:solidFill>
+                  <a:srgbClr val="334155"/>
+                </a:solidFill>
+                <a:latin typeface="DM Sans"/>
+                <a:ea typeface="DM Sans"/>
+                <a:cs typeface="DM Sans"/>
+                <a:sym typeface="DM Sans"/>
+              </a:rPr>
+              <a:t>zakup</a:t>
+            </a:r>
+            <a:r>
+              <a:rPr lang="en-US" sz="1500" b="0" i="1" u="none" strike="noStrike" cap="none" dirty="0">
+                <a:solidFill>
+                  <a:srgbClr val="334155"/>
+                </a:solidFill>
+                <a:latin typeface="DM Sans"/>
+                <a:ea typeface="DM Sans"/>
+                <a:cs typeface="DM Sans"/>
+                <a:sym typeface="DM Sans"/>
+              </a:rPr>
+              <a:t> </a:t>
+            </a:r>
+            <a:r>
+              <a:rPr lang="pl-PL" sz="1500" i="1" dirty="0">
+                <a:solidFill>
+                  <a:srgbClr val="334155"/>
+                </a:solidFill>
+                <a:latin typeface="DM Sans"/>
+                <a:ea typeface="DM Sans"/>
+                <a:cs typeface="DM Sans"/>
+                <a:sym typeface="DM Sans"/>
+              </a:rPr>
+              <a:t>5 popularnych gier AAA po cenach rynkowych</a:t>
+            </a:r>
+            <a:r>
+              <a:rPr lang="en-US" sz="1500" b="0" i="1" u="none" strike="noStrike" cap="none" dirty="0">
+                <a:solidFill>
+                  <a:srgbClr val="334155"/>
+                </a:solidFill>
+                <a:latin typeface="DM Sans"/>
+                <a:ea typeface="DM Sans"/>
+                <a:cs typeface="DM Sans"/>
+                <a:sym typeface="DM Sans"/>
+              </a:rPr>
+              <a:t>.</a:t>
+            </a:r>
+            <a:endParaRPr dirty="0"/>
           </a:p>
         </p:txBody>
       </p:sp>
@@ -19106,7 +19550,7 @@
         <p:spPr>
           <a:xfrm>
             <a:off x="571500" y="5229225"/>
-            <a:ext cx="11049000" cy="609600"/>
+            <a:ext cx="11049000" cy="738664"/>
           </a:xfrm>
           <a:prstGeom prst="rect">
             <a:avLst/>
@@ -19135,7 +19579,7 @@
               <a:buNone/>
             </a:pPr>
             <a:r>
-              <a:rPr lang="en-US" sz="1500" b="0" i="0" u="none" strike="noStrike" cap="none">
+              <a:rPr lang="en-US" sz="1500" b="0" i="0" u="none" strike="noStrike" cap="none" dirty="0">
                 <a:solidFill>
                   <a:srgbClr val="334155"/>
                 </a:solidFill>
@@ -19144,9 +19588,369 @@
                 <a:cs typeface="DM Sans"/>
                 <a:sym typeface="DM Sans"/>
               </a:rPr>
-              <a:t>Analiza Time-Series wykazuje drastyczne zmiany w sile nabywczej na rynkach rozwijających się w okresie 2022-2023 (inflacja i zmiany polityki Steam).</a:t>
+              <a:t>Analiza Time-Series </a:t>
             </a:r>
-            <a:endParaRPr/>
+            <a:r>
+              <a:rPr lang="en-US" sz="1500" b="0" i="0" u="none" strike="noStrike" cap="none" dirty="0" err="1">
+                <a:solidFill>
+                  <a:srgbClr val="334155"/>
+                </a:solidFill>
+                <a:latin typeface="DM Sans"/>
+                <a:ea typeface="DM Sans"/>
+                <a:cs typeface="DM Sans"/>
+                <a:sym typeface="DM Sans"/>
+              </a:rPr>
+              <a:t>wykazuje</a:t>
+            </a:r>
+            <a:r>
+              <a:rPr lang="en-US" sz="1500" b="0" i="0" u="none" strike="noStrike" cap="none" dirty="0">
+                <a:solidFill>
+                  <a:srgbClr val="334155"/>
+                </a:solidFill>
+                <a:latin typeface="DM Sans"/>
+                <a:ea typeface="DM Sans"/>
+                <a:cs typeface="DM Sans"/>
+                <a:sym typeface="DM Sans"/>
+              </a:rPr>
+              <a:t> </a:t>
+            </a:r>
+            <a:r>
+              <a:rPr lang="en-US" sz="1500" b="0" i="0" u="none" strike="noStrike" cap="none" dirty="0" err="1">
+                <a:solidFill>
+                  <a:srgbClr val="334155"/>
+                </a:solidFill>
+                <a:latin typeface="DM Sans"/>
+                <a:ea typeface="DM Sans"/>
+                <a:cs typeface="DM Sans"/>
+                <a:sym typeface="DM Sans"/>
+              </a:rPr>
+              <a:t>drastyczne</a:t>
+            </a:r>
+            <a:r>
+              <a:rPr lang="en-US" sz="1500" b="0" i="0" u="none" strike="noStrike" cap="none" dirty="0">
+                <a:solidFill>
+                  <a:srgbClr val="334155"/>
+                </a:solidFill>
+                <a:latin typeface="DM Sans"/>
+                <a:ea typeface="DM Sans"/>
+                <a:cs typeface="DM Sans"/>
+                <a:sym typeface="DM Sans"/>
+              </a:rPr>
+              <a:t> </a:t>
+            </a:r>
+            <a:r>
+              <a:rPr lang="en-US" sz="1500" b="0" i="0" u="none" strike="noStrike" cap="none" dirty="0" err="1">
+                <a:solidFill>
+                  <a:srgbClr val="334155"/>
+                </a:solidFill>
+                <a:latin typeface="DM Sans"/>
+                <a:ea typeface="DM Sans"/>
+                <a:cs typeface="DM Sans"/>
+                <a:sym typeface="DM Sans"/>
+              </a:rPr>
+              <a:t>zmiany</a:t>
+            </a:r>
+            <a:r>
+              <a:rPr lang="en-US" sz="1500" b="0" i="0" u="none" strike="noStrike" cap="none" dirty="0">
+                <a:solidFill>
+                  <a:srgbClr val="334155"/>
+                </a:solidFill>
+                <a:latin typeface="DM Sans"/>
+                <a:ea typeface="DM Sans"/>
+                <a:cs typeface="DM Sans"/>
+                <a:sym typeface="DM Sans"/>
+              </a:rPr>
+              <a:t> w </a:t>
+            </a:r>
+            <a:r>
+              <a:rPr lang="en-US" sz="1500" b="0" i="0" u="none" strike="noStrike" cap="none" dirty="0" err="1">
+                <a:solidFill>
+                  <a:srgbClr val="334155"/>
+                </a:solidFill>
+                <a:latin typeface="DM Sans"/>
+                <a:ea typeface="DM Sans"/>
+                <a:cs typeface="DM Sans"/>
+                <a:sym typeface="DM Sans"/>
+              </a:rPr>
+              <a:t>sile</a:t>
+            </a:r>
+            <a:r>
+              <a:rPr lang="en-US" sz="1500" b="0" i="0" u="none" strike="noStrike" cap="none" dirty="0">
+                <a:solidFill>
+                  <a:srgbClr val="334155"/>
+                </a:solidFill>
+                <a:latin typeface="DM Sans"/>
+                <a:ea typeface="DM Sans"/>
+                <a:cs typeface="DM Sans"/>
+                <a:sym typeface="DM Sans"/>
+              </a:rPr>
+              <a:t> </a:t>
+            </a:r>
+            <a:r>
+              <a:rPr lang="en-US" sz="1500" b="0" i="0" u="none" strike="noStrike" cap="none" dirty="0" err="1">
+                <a:solidFill>
+                  <a:srgbClr val="334155"/>
+                </a:solidFill>
+                <a:latin typeface="DM Sans"/>
+                <a:ea typeface="DM Sans"/>
+                <a:cs typeface="DM Sans"/>
+                <a:sym typeface="DM Sans"/>
+              </a:rPr>
+              <a:t>nabywczej</a:t>
+            </a:r>
+            <a:r>
+              <a:rPr lang="en-US" sz="1500" b="0" i="0" u="none" strike="noStrike" cap="none" dirty="0">
+                <a:solidFill>
+                  <a:srgbClr val="334155"/>
+                </a:solidFill>
+                <a:latin typeface="DM Sans"/>
+                <a:ea typeface="DM Sans"/>
+                <a:cs typeface="DM Sans"/>
+                <a:sym typeface="DM Sans"/>
+              </a:rPr>
+              <a:t> </a:t>
+            </a:r>
+            <a:r>
+              <a:rPr lang="en-US" sz="1500" b="0" i="0" u="none" strike="noStrike" cap="none" dirty="0" err="1">
+                <a:solidFill>
+                  <a:srgbClr val="334155"/>
+                </a:solidFill>
+                <a:latin typeface="DM Sans"/>
+                <a:ea typeface="DM Sans"/>
+                <a:cs typeface="DM Sans"/>
+                <a:sym typeface="DM Sans"/>
+              </a:rPr>
+              <a:t>na</a:t>
+            </a:r>
+            <a:r>
+              <a:rPr lang="en-US" sz="1500" b="0" i="0" u="none" strike="noStrike" cap="none" dirty="0">
+                <a:solidFill>
+                  <a:srgbClr val="334155"/>
+                </a:solidFill>
+                <a:latin typeface="DM Sans"/>
+                <a:ea typeface="DM Sans"/>
+                <a:cs typeface="DM Sans"/>
+                <a:sym typeface="DM Sans"/>
+              </a:rPr>
+              <a:t> </a:t>
+            </a:r>
+            <a:r>
+              <a:rPr lang="en-US" sz="1500" b="0" i="0" u="none" strike="noStrike" cap="none" dirty="0" err="1">
+                <a:solidFill>
+                  <a:srgbClr val="334155"/>
+                </a:solidFill>
+                <a:latin typeface="DM Sans"/>
+                <a:ea typeface="DM Sans"/>
+                <a:cs typeface="DM Sans"/>
+                <a:sym typeface="DM Sans"/>
+              </a:rPr>
+              <a:t>rynkach</a:t>
+            </a:r>
+            <a:r>
+              <a:rPr lang="en-US" sz="1500" b="0" i="0" u="none" strike="noStrike" cap="none" dirty="0">
+                <a:solidFill>
+                  <a:srgbClr val="334155"/>
+                </a:solidFill>
+                <a:latin typeface="DM Sans"/>
+                <a:ea typeface="DM Sans"/>
+                <a:cs typeface="DM Sans"/>
+                <a:sym typeface="DM Sans"/>
+              </a:rPr>
+              <a:t> </a:t>
+            </a:r>
+            <a:r>
+              <a:rPr lang="en-US" sz="1500" b="0" i="0" u="none" strike="noStrike" cap="none" dirty="0" err="1">
+                <a:solidFill>
+                  <a:srgbClr val="334155"/>
+                </a:solidFill>
+                <a:latin typeface="DM Sans"/>
+                <a:ea typeface="DM Sans"/>
+                <a:cs typeface="DM Sans"/>
+                <a:sym typeface="DM Sans"/>
+              </a:rPr>
+              <a:t>rozwijających</a:t>
+            </a:r>
+            <a:r>
+              <a:rPr lang="en-US" sz="1500" b="0" i="0" u="none" strike="noStrike" cap="none" dirty="0">
+                <a:solidFill>
+                  <a:srgbClr val="334155"/>
+                </a:solidFill>
+                <a:latin typeface="DM Sans"/>
+                <a:ea typeface="DM Sans"/>
+                <a:cs typeface="DM Sans"/>
+                <a:sym typeface="DM Sans"/>
+              </a:rPr>
+              <a:t> </a:t>
+            </a:r>
+            <a:r>
+              <a:rPr lang="en-US" sz="1500" b="0" i="0" u="none" strike="noStrike" cap="none" dirty="0" err="1">
+                <a:solidFill>
+                  <a:srgbClr val="334155"/>
+                </a:solidFill>
+                <a:latin typeface="DM Sans"/>
+                <a:ea typeface="DM Sans"/>
+                <a:cs typeface="DM Sans"/>
+                <a:sym typeface="DM Sans"/>
+              </a:rPr>
+              <a:t>się</a:t>
+            </a:r>
+            <a:r>
+              <a:rPr lang="en-US" sz="1500" b="0" i="0" u="none" strike="noStrike" cap="none" dirty="0">
+                <a:solidFill>
+                  <a:srgbClr val="334155"/>
+                </a:solidFill>
+                <a:latin typeface="DM Sans"/>
+                <a:ea typeface="DM Sans"/>
+                <a:cs typeface="DM Sans"/>
+                <a:sym typeface="DM Sans"/>
+              </a:rPr>
+              <a:t> w </a:t>
+            </a:r>
+            <a:r>
+              <a:rPr lang="en-US" sz="1500" b="0" i="0" u="none" strike="noStrike" cap="none" dirty="0" err="1">
+                <a:solidFill>
+                  <a:srgbClr val="334155"/>
+                </a:solidFill>
+                <a:latin typeface="DM Sans"/>
+                <a:ea typeface="DM Sans"/>
+                <a:cs typeface="DM Sans"/>
+                <a:sym typeface="DM Sans"/>
+              </a:rPr>
+              <a:t>okresie</a:t>
+            </a:r>
+            <a:r>
+              <a:rPr lang="en-US" sz="1500" b="0" i="0" u="none" strike="noStrike" cap="none" dirty="0">
+                <a:solidFill>
+                  <a:srgbClr val="334155"/>
+                </a:solidFill>
+                <a:latin typeface="DM Sans"/>
+                <a:ea typeface="DM Sans"/>
+                <a:cs typeface="DM Sans"/>
+                <a:sym typeface="DM Sans"/>
+              </a:rPr>
+              <a:t> </a:t>
+            </a:r>
+            <a:r>
+              <a:rPr lang="pl-PL" sz="1500" b="0" i="0" u="none" strike="noStrike" cap="none" dirty="0">
+                <a:solidFill>
+                  <a:srgbClr val="334155"/>
+                </a:solidFill>
+                <a:latin typeface="DM Sans"/>
+                <a:ea typeface="DM Sans"/>
+                <a:cs typeface="DM Sans"/>
+                <a:sym typeface="DM Sans"/>
+              </a:rPr>
+              <a:t>2019-2024</a:t>
+            </a:r>
+            <a:r>
+              <a:rPr lang="en-US" sz="1500" b="0" i="0" u="none" strike="noStrike" cap="none" dirty="0">
+                <a:solidFill>
+                  <a:srgbClr val="334155"/>
+                </a:solidFill>
+                <a:latin typeface="DM Sans"/>
+                <a:ea typeface="DM Sans"/>
+                <a:cs typeface="DM Sans"/>
+                <a:sym typeface="DM Sans"/>
+              </a:rPr>
+              <a:t> (</a:t>
+            </a:r>
+            <a:r>
+              <a:rPr lang="en-US" sz="1500" b="0" i="0" u="none" strike="noStrike" cap="none" dirty="0" err="1">
+                <a:solidFill>
+                  <a:srgbClr val="334155"/>
+                </a:solidFill>
+                <a:latin typeface="DM Sans"/>
+                <a:ea typeface="DM Sans"/>
+                <a:cs typeface="DM Sans"/>
+                <a:sym typeface="DM Sans"/>
+              </a:rPr>
+              <a:t>inflacja</a:t>
+            </a:r>
+            <a:r>
+              <a:rPr lang="en-US" sz="1500" b="0" i="0" u="none" strike="noStrike" cap="none" dirty="0">
+                <a:solidFill>
+                  <a:srgbClr val="334155"/>
+                </a:solidFill>
+                <a:latin typeface="DM Sans"/>
+                <a:ea typeface="DM Sans"/>
+                <a:cs typeface="DM Sans"/>
+                <a:sym typeface="DM Sans"/>
+              </a:rPr>
+              <a:t> </a:t>
+            </a:r>
+            <a:r>
+              <a:rPr lang="en-US" sz="1500" b="0" i="0" u="none" strike="noStrike" cap="none" dirty="0" err="1">
+                <a:solidFill>
+                  <a:srgbClr val="334155"/>
+                </a:solidFill>
+                <a:latin typeface="DM Sans"/>
+                <a:ea typeface="DM Sans"/>
+                <a:cs typeface="DM Sans"/>
+                <a:sym typeface="DM Sans"/>
+              </a:rPr>
+              <a:t>i</a:t>
+            </a:r>
+            <a:r>
+              <a:rPr lang="en-US" sz="1500" b="0" i="0" u="none" strike="noStrike" cap="none" dirty="0">
+                <a:solidFill>
+                  <a:srgbClr val="334155"/>
+                </a:solidFill>
+                <a:latin typeface="DM Sans"/>
+                <a:ea typeface="DM Sans"/>
+                <a:cs typeface="DM Sans"/>
+                <a:sym typeface="DM Sans"/>
+              </a:rPr>
+              <a:t> </a:t>
+            </a:r>
+            <a:r>
+              <a:rPr lang="en-US" sz="1500" b="0" i="0" u="none" strike="noStrike" cap="none" dirty="0" err="1">
+                <a:solidFill>
+                  <a:srgbClr val="334155"/>
+                </a:solidFill>
+                <a:latin typeface="DM Sans"/>
+                <a:ea typeface="DM Sans"/>
+                <a:cs typeface="DM Sans"/>
+                <a:sym typeface="DM Sans"/>
+              </a:rPr>
+              <a:t>zmiany</a:t>
+            </a:r>
+            <a:r>
+              <a:rPr lang="en-US" sz="1500" b="0" i="0" u="none" strike="noStrike" cap="none" dirty="0">
+                <a:solidFill>
+                  <a:srgbClr val="334155"/>
+                </a:solidFill>
+                <a:latin typeface="DM Sans"/>
+                <a:ea typeface="DM Sans"/>
+                <a:cs typeface="DM Sans"/>
+                <a:sym typeface="DM Sans"/>
+              </a:rPr>
+              <a:t> </a:t>
+            </a:r>
+            <a:r>
+              <a:rPr lang="en-US" sz="1500" b="0" i="0" u="none" strike="noStrike" cap="none" dirty="0" err="1">
+                <a:solidFill>
+                  <a:srgbClr val="334155"/>
+                </a:solidFill>
+                <a:latin typeface="DM Sans"/>
+                <a:ea typeface="DM Sans"/>
+                <a:cs typeface="DM Sans"/>
+                <a:sym typeface="DM Sans"/>
+              </a:rPr>
+              <a:t>polityki</a:t>
+            </a:r>
+            <a:r>
+              <a:rPr lang="en-US" sz="1500" b="0" i="0" u="none" strike="noStrike" cap="none" dirty="0">
+                <a:solidFill>
+                  <a:srgbClr val="334155"/>
+                </a:solidFill>
+                <a:latin typeface="DM Sans"/>
+                <a:ea typeface="DM Sans"/>
+                <a:cs typeface="DM Sans"/>
+                <a:sym typeface="DM Sans"/>
+              </a:rPr>
+              <a:t> Steam).</a:t>
+            </a:r>
+            <a:endParaRPr dirty="0"/>
           </a:p>
         </p:txBody>
       </p:sp>

--- a/PricePower.pptx
+++ b/PricePower.pptx
@@ -796,8 +796,8 @@
         </p:nvSpPr>
         <p:spPr>
           <a:xfrm>
-            <a:off x="1143225" y="685800"/>
-            <a:ext cx="4572225" cy="3429000"/>
+            <a:off x="381000" y="685800"/>
+            <a:ext cx="6096000" cy="3429000"/>
           </a:xfrm>
           <a:custGeom>
             <a:avLst/>
@@ -12067,7 +12067,7 @@
         </p:nvSpPr>
         <p:spPr>
           <a:xfrm>
-            <a:off x="10085775" y="5679275"/>
+            <a:off x="10153500" y="5465915"/>
             <a:ext cx="2038500" cy="1131300"/>
           </a:xfrm>
           <a:prstGeom prst="rect">
@@ -12094,7 +12094,7 @@
               <a:buNone/>
             </a:pPr>
             <a:r>
-              <a:rPr lang="en-US" sz="1050">
+              <a:rPr lang="en-US" sz="1050" dirty="0" err="1">
                 <a:solidFill>
                   <a:srgbClr val="94A3B8"/>
                 </a:solidFill>
@@ -12103,10 +12103,22 @@
                 <a:cs typeface="DM Sans"/>
                 <a:sym typeface="DM Sans"/>
               </a:rPr>
-              <a:t>Autorzy:</a:t>
+              <a:t>Autorzy</a:t>
+            </a:r>
+            <a:r>
+              <a:rPr lang="en-US" sz="1050" dirty="0">
+                <a:solidFill>
+                  <a:srgbClr val="94A3B8"/>
+                </a:solidFill>
+                <a:latin typeface="DM Sans"/>
+                <a:ea typeface="DM Sans"/>
+                <a:cs typeface="DM Sans"/>
+                <a:sym typeface="DM Sans"/>
+              </a:rPr>
+              <a:t>:</a:t>
             </a:r>
             <a:br>
-              <a:rPr lang="en-US" sz="1050">
+              <a:rPr lang="en-US" sz="1050" dirty="0">
                 <a:solidFill>
                   <a:srgbClr val="94A3B8"/>
                 </a:solidFill>
@@ -12117,7 +12129,7 @@
               </a:rPr>
             </a:br>
             <a:r>
-              <a:rPr lang="en-US" sz="1050">
+              <a:rPr lang="en-US" sz="1050" dirty="0">
                 <a:solidFill>
                   <a:srgbClr val="94A3B8"/>
                 </a:solidFill>
@@ -12128,7 +12140,7 @@
               </a:rPr>
               <a:t>Wiktor Kozakowski</a:t>
             </a:r>
-            <a:endParaRPr sz="1050">
+            <a:endParaRPr sz="1050" dirty="0">
               <a:solidFill>
                 <a:srgbClr val="94A3B8"/>
               </a:solidFill>
@@ -12149,7 +12161,7 @@
               <a:buNone/>
             </a:pPr>
             <a:r>
-              <a:rPr lang="en-US" sz="1050">
+              <a:rPr lang="en-US" sz="1050" dirty="0">
                 <a:solidFill>
                   <a:srgbClr val="94A3B8"/>
                 </a:solidFill>
@@ -12160,7 +12172,7 @@
               </a:rPr>
               <a:t>Krystian Twarowski</a:t>
             </a:r>
-            <a:endParaRPr sz="1050">
+            <a:endParaRPr sz="1050" dirty="0">
               <a:solidFill>
                 <a:srgbClr val="94A3B8"/>
               </a:solidFill>
@@ -12181,7 +12193,7 @@
               <a:buNone/>
             </a:pPr>
             <a:r>
-              <a:rPr lang="en-US" sz="1050">
+              <a:rPr lang="en-US" sz="1050" dirty="0">
                 <a:solidFill>
                   <a:srgbClr val="94A3B8"/>
                 </a:solidFill>
@@ -12190,9 +12202,21 @@
                 <a:cs typeface="DM Sans"/>
                 <a:sym typeface="DM Sans"/>
               </a:rPr>
-              <a:t>Władysław Liegmanowski</a:t>
+              <a:t>Władysław </a:t>
             </a:r>
-            <a:endParaRPr sz="1050">
+            <a:r>
+              <a:rPr lang="en-US" sz="1050" dirty="0" err="1">
+                <a:solidFill>
+                  <a:srgbClr val="94A3B8"/>
+                </a:solidFill>
+                <a:latin typeface="DM Sans"/>
+                <a:ea typeface="DM Sans"/>
+                <a:cs typeface="DM Sans"/>
+                <a:sym typeface="DM Sans"/>
+              </a:rPr>
+              <a:t>Liegmanowski</a:t>
+            </a:r>
+            <a:endParaRPr sz="1050" dirty="0">
               <a:solidFill>
                 <a:srgbClr val="94A3B8"/>
               </a:solidFill>
@@ -12213,7 +12237,7 @@
               <a:buNone/>
             </a:pPr>
             <a:r>
-              <a:rPr lang="en-US" sz="1050">
+              <a:rPr lang="en-US" sz="1050" dirty="0">
                 <a:solidFill>
                   <a:srgbClr val="94A3B8"/>
                 </a:solidFill>
@@ -12222,9 +12246,21 @@
                 <a:cs typeface="DM Sans"/>
                 <a:sym typeface="DM Sans"/>
               </a:rPr>
-              <a:t>Maciej Żelazkiewicz</a:t>
+              <a:t>Maciej </a:t>
             </a:r>
-            <a:endParaRPr sz="1050">
+            <a:r>
+              <a:rPr lang="en-US" sz="1050" dirty="0" err="1">
+                <a:solidFill>
+                  <a:srgbClr val="94A3B8"/>
+                </a:solidFill>
+                <a:latin typeface="DM Sans"/>
+                <a:ea typeface="DM Sans"/>
+                <a:cs typeface="DM Sans"/>
+                <a:sym typeface="DM Sans"/>
+              </a:rPr>
+              <a:t>Żelazkiewicz</a:t>
+            </a:r>
+            <a:endParaRPr sz="1050" dirty="0">
               <a:solidFill>
                 <a:srgbClr val="94A3B8"/>
               </a:solidFill>
@@ -12245,7 +12281,7 @@
               <a:buNone/>
             </a:pPr>
             <a:r>
-              <a:rPr lang="en-US" sz="1050">
+              <a:rPr lang="en-US" sz="1050" dirty="0">
                 <a:solidFill>
                   <a:srgbClr val="94A3B8"/>
                 </a:solidFill>
@@ -12254,9 +12290,21 @@
                 <a:cs typeface="DM Sans"/>
                 <a:sym typeface="DM Sans"/>
               </a:rPr>
-              <a:t>Jakub Klesiński</a:t>
+              <a:t>Jakub </a:t>
             </a:r>
-            <a:endParaRPr sz="1050">
+            <a:r>
+              <a:rPr lang="en-US" sz="1050" dirty="0" err="1">
+                <a:solidFill>
+                  <a:srgbClr val="94A3B8"/>
+                </a:solidFill>
+                <a:latin typeface="DM Sans"/>
+                <a:ea typeface="DM Sans"/>
+                <a:cs typeface="DM Sans"/>
+                <a:sym typeface="DM Sans"/>
+              </a:rPr>
+              <a:t>Klesiński</a:t>
+            </a:r>
+            <a:endParaRPr sz="1050" dirty="0">
               <a:solidFill>
                 <a:srgbClr val="94A3B8"/>
               </a:solidFill>
@@ -12277,7 +12325,7 @@
               <a:buNone/>
             </a:pPr>
             <a:r>
-              <a:rPr lang="en-US" sz="1050">
+              <a:rPr lang="en-US" sz="1050" dirty="0">
                 <a:solidFill>
                   <a:srgbClr val="94A3B8"/>
                 </a:solidFill>
@@ -12286,9 +12334,21 @@
                 <a:cs typeface="DM Sans"/>
                 <a:sym typeface="DM Sans"/>
               </a:rPr>
-              <a:t>Sebastian Mrowiński</a:t>
+              <a:t>Sebastian </a:t>
             </a:r>
-            <a:endParaRPr sz="1050">
+            <a:r>
+              <a:rPr lang="en-US" sz="1050" dirty="0" err="1">
+                <a:solidFill>
+                  <a:srgbClr val="94A3B8"/>
+                </a:solidFill>
+                <a:latin typeface="DM Sans"/>
+                <a:ea typeface="DM Sans"/>
+                <a:cs typeface="DM Sans"/>
+                <a:sym typeface="DM Sans"/>
+              </a:rPr>
+              <a:t>Mrowiński</a:t>
+            </a:r>
+            <a:endParaRPr sz="1050" dirty="0">
               <a:solidFill>
                 <a:srgbClr val="94A3B8"/>
               </a:solidFill>
@@ -19151,17 +19211,10 @@
           </a:bodyPr>
           <a:lstStyle/>
           <a:p>
-            <a:pPr marL="0" marR="0" lvl="0" indent="0" algn="ctr" rtl="0">
+            <a:pPr algn="ctr">
               <a:lnSpc>
                 <a:spcPct val="160000"/>
               </a:lnSpc>
-              <a:spcBef>
-                <a:spcPts val="0"/>
-              </a:spcBef>
-              <a:spcAft>
-                <a:spcPts val="0"/>
-              </a:spcAft>
-              <a:buNone/>
             </a:pPr>
             <a:r>
               <a:rPr lang="en-US" sz="1500" b="0" i="1" u="none" strike="noStrike" cap="none" dirty="0" err="1">
@@ -19188,169 +19241,141 @@
               <a:t> </a:t>
             </a:r>
             <a:r>
-              <a:rPr lang="en-US" sz="1500" b="0" i="1" u="none" strike="noStrike" cap="none" dirty="0" err="1">
+              <a:rPr lang="en-US" sz="1500" i="1" dirty="0" err="1">
                 <a:solidFill>
                   <a:srgbClr val="334155"/>
                 </a:solidFill>
                 <a:latin typeface="DM Sans"/>
-                <a:ea typeface="DM Sans"/>
-                <a:cs typeface="DM Sans"/>
                 <a:sym typeface="DM Sans"/>
               </a:rPr>
               <a:t>przedstawia</a:t>
             </a:r>
             <a:r>
-              <a:rPr lang="en-US" sz="1500" b="0" i="1" u="none" strike="noStrike" cap="none" dirty="0">
+              <a:rPr lang="en-US" sz="1500" i="1" dirty="0">
                 <a:solidFill>
                   <a:srgbClr val="334155"/>
                 </a:solidFill>
                 <a:latin typeface="DM Sans"/>
-                <a:ea typeface="DM Sans"/>
-                <a:cs typeface="DM Sans"/>
                 <a:sym typeface="DM Sans"/>
               </a:rPr>
               <a:t> "Time-to-Game" – </a:t>
             </a:r>
             <a:r>
-              <a:rPr lang="en-US" sz="1500" b="0" i="1" u="none" strike="noStrike" cap="none" dirty="0" err="1">
+              <a:rPr lang="en-US" sz="1500" i="1" dirty="0" err="1">
                 <a:solidFill>
                   <a:srgbClr val="334155"/>
                 </a:solidFill>
                 <a:latin typeface="DM Sans"/>
-                <a:ea typeface="DM Sans"/>
-                <a:cs typeface="DM Sans"/>
                 <a:sym typeface="DM Sans"/>
               </a:rPr>
               <a:t>liczbę</a:t>
             </a:r>
             <a:r>
-              <a:rPr lang="en-US" sz="1500" b="0" i="1" u="none" strike="noStrike" cap="none" dirty="0">
+              <a:rPr lang="en-US" sz="1500" i="1" dirty="0">
                 <a:solidFill>
                   <a:srgbClr val="334155"/>
                 </a:solidFill>
                 <a:latin typeface="DM Sans"/>
-                <a:ea typeface="DM Sans"/>
-                <a:cs typeface="DM Sans"/>
                 <a:sym typeface="DM Sans"/>
               </a:rPr>
               <a:t> </a:t>
             </a:r>
             <a:r>
-              <a:rPr lang="en-US" sz="1500" b="0" i="1" u="none" strike="noStrike" cap="none" dirty="0" err="1">
+              <a:rPr lang="en-US" sz="1500" i="1" dirty="0" err="1">
                 <a:solidFill>
                   <a:srgbClr val="334155"/>
                 </a:solidFill>
                 <a:latin typeface="DM Sans"/>
-                <a:ea typeface="DM Sans"/>
-                <a:cs typeface="DM Sans"/>
                 <a:sym typeface="DM Sans"/>
               </a:rPr>
               <a:t>godzin</a:t>
             </a:r>
             <a:r>
-              <a:rPr lang="en-US" sz="1500" b="0" i="1" u="none" strike="noStrike" cap="none" dirty="0">
+              <a:rPr lang="en-US" sz="1500" i="1" dirty="0">
                 <a:solidFill>
                   <a:srgbClr val="334155"/>
                 </a:solidFill>
                 <a:latin typeface="DM Sans"/>
-                <a:ea typeface="DM Sans"/>
-                <a:cs typeface="DM Sans"/>
                 <a:sym typeface="DM Sans"/>
               </a:rPr>
               <a:t> </a:t>
             </a:r>
             <a:r>
-              <a:rPr lang="en-US" sz="1500" b="0" i="1" u="none" strike="noStrike" cap="none" dirty="0" err="1">
+              <a:rPr lang="en-US" sz="1500" i="1" dirty="0" err="1">
                 <a:solidFill>
                   <a:srgbClr val="334155"/>
                 </a:solidFill>
                 <a:latin typeface="DM Sans"/>
-                <a:ea typeface="DM Sans"/>
-                <a:cs typeface="DM Sans"/>
                 <a:sym typeface="DM Sans"/>
               </a:rPr>
               <a:t>pracy</a:t>
             </a:r>
             <a:r>
-              <a:rPr lang="en-US" sz="1500" b="0" i="1" u="none" strike="noStrike" cap="none" dirty="0">
+              <a:rPr lang="en-US" sz="1500" i="1" dirty="0">
                 <a:solidFill>
                   <a:srgbClr val="334155"/>
                 </a:solidFill>
                 <a:latin typeface="DM Sans"/>
-                <a:ea typeface="DM Sans"/>
-                <a:cs typeface="DM Sans"/>
                 <a:sym typeface="DM Sans"/>
               </a:rPr>
               <a:t> </a:t>
             </a:r>
             <a:r>
-              <a:rPr lang="en-US" sz="1500" b="0" i="1" u="none" strike="noStrike" cap="none" dirty="0" err="1">
+              <a:rPr lang="en-US" sz="1500" i="1" dirty="0" err="1">
                 <a:solidFill>
                   <a:srgbClr val="334155"/>
                 </a:solidFill>
                 <a:latin typeface="DM Sans"/>
-                <a:ea typeface="DM Sans"/>
-                <a:cs typeface="DM Sans"/>
                 <a:sym typeface="DM Sans"/>
               </a:rPr>
               <a:t>potrzebną</a:t>
             </a:r>
             <a:r>
-              <a:rPr lang="en-US" sz="1500" b="0" i="1" u="none" strike="noStrike" cap="none" dirty="0">
+              <a:rPr lang="en-US" sz="1500" i="1" dirty="0">
                 <a:solidFill>
                   <a:srgbClr val="334155"/>
                 </a:solidFill>
                 <a:latin typeface="DM Sans"/>
-                <a:ea typeface="DM Sans"/>
-                <a:cs typeface="DM Sans"/>
                 <a:sym typeface="DM Sans"/>
               </a:rPr>
               <a:t> </a:t>
             </a:r>
             <a:r>
-              <a:rPr lang="en-US" sz="1500" b="0" i="1" u="none" strike="noStrike" cap="none" dirty="0" err="1">
+              <a:rPr lang="en-US" sz="1500" i="1" dirty="0" err="1">
                 <a:solidFill>
                   <a:srgbClr val="334155"/>
                 </a:solidFill>
                 <a:latin typeface="DM Sans"/>
-                <a:ea typeface="DM Sans"/>
-                <a:cs typeface="DM Sans"/>
                 <a:sym typeface="DM Sans"/>
               </a:rPr>
               <a:t>na</a:t>
             </a:r>
             <a:r>
-              <a:rPr lang="en-US" sz="1500" b="0" i="1" u="none" strike="noStrike" cap="none" dirty="0">
+              <a:rPr lang="en-US" sz="1500" i="1" dirty="0">
                 <a:solidFill>
                   <a:srgbClr val="334155"/>
                 </a:solidFill>
                 <a:latin typeface="DM Sans"/>
-                <a:ea typeface="DM Sans"/>
-                <a:cs typeface="DM Sans"/>
                 <a:sym typeface="DM Sans"/>
               </a:rPr>
               <a:t> </a:t>
             </a:r>
             <a:r>
-              <a:rPr lang="en-US" sz="1500" b="0" i="1" u="none" strike="noStrike" cap="none" dirty="0" err="1">
+              <a:rPr lang="en-US" sz="1500" i="1" dirty="0" err="1">
                 <a:solidFill>
                   <a:srgbClr val="334155"/>
                 </a:solidFill>
                 <a:latin typeface="DM Sans"/>
-                <a:ea typeface="DM Sans"/>
-                <a:cs typeface="DM Sans"/>
                 <a:sym typeface="DM Sans"/>
               </a:rPr>
               <a:t>zakup</a:t>
             </a:r>
             <a:r>
-              <a:rPr lang="en-US" sz="1500" b="0" i="1" u="none" strike="noStrike" cap="none" dirty="0">
+              <a:rPr lang="en-US" sz="1500" i="1" dirty="0">
                 <a:solidFill>
                   <a:srgbClr val="334155"/>
                 </a:solidFill>
                 <a:latin typeface="DM Sans"/>
-                <a:ea typeface="DM Sans"/>
-                <a:cs typeface="DM Sans"/>
                 <a:sym typeface="DM Sans"/>
               </a:rPr>
               <a:t> </a:t>
@@ -19361,25 +19386,35 @@
                   <a:srgbClr val="334155"/>
                 </a:solidFill>
                 <a:latin typeface="DM Sans"/>
-                <a:ea typeface="DM Sans"/>
-                <a:cs typeface="DM Sans"/>
                 <a:sym typeface="DM Sans"/>
               </a:rPr>
               <a:t>5 popularnych gier AAA po cenach rynkowych</a:t>
             </a:r>
             <a:r>
-              <a:rPr lang="en-US" sz="1500" b="0" i="1" u="none" strike="noStrike" cap="none" dirty="0">
+              <a:rPr lang="pl-PL" sz="1500" i="1" dirty="0">
                 <a:solidFill>
                   <a:srgbClr val="334155"/>
                 </a:solidFill>
                 <a:latin typeface="DM Sans"/>
-                <a:ea typeface="DM Sans"/>
-                <a:cs typeface="DM Sans"/>
+              </a:rPr>
+              <a:t>(GTA V, Wiedźmin 3, Cyberpunk 2077, RDR 2, BG3)</a:t>
+            </a:r>
+            <a:r>
+              <a:rPr lang="en-US" sz="1500" i="1" dirty="0">
+                <a:solidFill>
+                  <a:srgbClr val="334155"/>
+                </a:solidFill>
+                <a:latin typeface="DM Sans"/>
                 <a:sym typeface="DM Sans"/>
               </a:rPr>
               <a:t>.</a:t>
             </a:r>
-            <a:endParaRPr dirty="0"/>
+            <a:endParaRPr sz="1500" i="1" dirty="0">
+              <a:solidFill>
+                <a:srgbClr val="334155"/>
+              </a:solidFill>
+              <a:latin typeface="DM Sans"/>
+            </a:endParaRPr>
           </a:p>
         </p:txBody>
       </p:sp>
